--- a/Slides/Semana 6/semana_6_slides.pptx
+++ b/Slides/Semana 6/semana_6_slides.pptx
@@ -23,9 +23,11 @@
     <p:sldId id="271" r:id="rId17"/>
     <p:sldId id="272" r:id="rId18"/>
     <p:sldId id="273" r:id="rId19"/>
+    <p:sldId id="274" r:id="rId20"/>
+    <p:sldId id="275" r:id="rId21"/>
   </p:sldIdLst>
   <p:notesMasterIdLst>
-    <p:notesMasterId r:id="rId20"/>
+    <p:notesMasterId r:id="rId22"/>
   </p:notesMasterIdLst>
   <p:sldSz cx="12192000" cy="6858000"/>
   <p:notesSz cx="6858000" cy="12192000"/>
@@ -519,7 +521,7 @@
           <a:p>
             <a:r>
               <a:rPr lang="en-US" dirty="0"/>
-              <a:t>Notas: Abertura da mini aula (20 min). Unidade II, entre a CF2 (Sem 5) e a CF3 (Sem 8). Mensagem central no subtítulo: a costura de uma textura não é falta de talento artístico — é uma imagem cujas bordas não são contínuas. Marco da semana: pela primeira vez uma IMAGEM REAL entra no pipeline. Nas Semanas 3-5 o Albedo era cor plana; agora vira uma superfície com variação e história. Não é tutorial de cliques: é entender por que a repetição precisa ser invisível.</a:t>
+              <a:t>Notas: Abertura da mini aula (20 min). Unidade II, entre a crítica formal da Semana 5 e a CF2 (Semana 8). Mensagem central no subtítulo: a costura de uma textura não é falta de talento artístico — é uma imagem cujas bordas não são contínuas. Marco da semana: pela primeira vez uma IMAGEM REAL entra no pipeline (fotografada OU pintada, dependendo da trilha visual do estudante). Nas Semanas 3-5 o Albedo era cor plana; agora vira uma superfície com variação e história. Não é tutorial de cliques: é entender por que a repetição precisa ser invisível — em qualquer trilha.</a:t>
             </a:r>
             <a:endParaRPr lang="en-US" dirty="0"/>
           </a:p>
@@ -607,7 +609,12 @@
           <a:p>
             <a:r>
               <a:rPr lang="en-US" dirty="0"/>
-              <a:t>Notas: Núcleo procedimental da semana. O ciclo Krita -&gt; Blender vai se repetir várias vezes no estúdio — é normal. Reforçar o loop C-&gt;D-&gt;C: verificar no Wrap Around, voltar ao patch se houver costura. O GitHub Action converte o bloco mermaid em imagem automaticamente.</a:t>
+              <a:t>Notas: O Wrap Around (W) é o único feedback confiável em tempo real — o estudante vê a costura ANTES de ir para o Blender, na trilha fotorrealista ou na estilizada. Erro comum nº 2: o PNG isolado parece perfeito, mas a costura só aparece quando tilea. Insistir no uso do Wrap Around durante todo o processo, não só no fim. A régua do "bom o suficiente" é uma decisão artística, não técnica.
+[!FIGURA]
+Objetivo didático: mostrar como o Wrap Around revela costuras que são invisíveis na imagem isolada.
+Arquivo sugerido: assets/krita_wrap_around.webp
+Descrição: captura de tela do Krita com uma textura de pedra em modo Wrap Around ativo, exibindo a repetição em grade 3x3. Uma costura residual aparece destacada por um círculo vermelho anotado.
+Como produzir: no Krita, abrir uma textura de pedra parcialmente tratada, pressionar W para ativar o Wrap Around, dar zoom out até ver a repetição em grade. Capturar a tela e anotar a costura residual com um círculo no próprio Krita.</a:t>
             </a:r>
             <a:endParaRPr lang="en-US" dirty="0"/>
           </a:p>
@@ -695,7 +702,7 @@
           <a:p>
             <a:r>
               <a:rPr lang="en-US" dirty="0"/>
-              <a:t>Notas: Deixar claro que baixar textura pronta NÃO isenta de entender o seamless. Se o estudante baixa do Poly Haven, precisa documentar por que é seamless (apontar continuidade de bordas no Wrap Around) e adaptar cor/detalhe ao tema. "Baixar é válido. Entregar sem entender não é." Erro comum nº 6 do plano. Se a internet do lab for instável, ter um pen drive com 5-6 texturas preparadas.</a:t>
+              <a:t>Notas: Núcleo procedimental da semana. O ciclo Krita -&gt; Blender vai se repetir várias vezes no estúdio — é normal, nas duas trilhas visuais. Reforçar o loop C-&gt;D-&gt;C: verificar no Wrap Around, voltar ao patch se houver costura. O GitHub Action converte o bloco mermaid em imagem automaticamente.</a:t>
             </a:r>
             <a:endParaRPr lang="en-US" dirty="0"/>
           </a:p>
@@ -783,7 +790,7 @@
           <a:p>
             <a:r>
               <a:rPr lang="en-US" dirty="0"/>
-              <a:t>Notas: Erro comum nº 5. Escala não é problema do seamless — é de mapeamento. Adicionar nó Mapping (Shift+A &gt; Vector &gt; Mapping) entre Texture Coordinate e Image Texture, ajustar Scale em X e Y. Referência física: uma pedra de parede medieval tem 20-40 cm — quanto isso é em relação ao Asset 01?</a:t>
+              <a:t>Notas: Deixar claro que baixar textura pronta NÃO isenta de entender o seamless, em nenhuma trilha. Se o estudante baixa do Poly Haven ou de um banco estilizado, precisa documentar por que é seamless (apontar continuidade de bordas no Wrap Around) e adaptar cor/detalhe ao tema. "Baixar é válido. Entregar sem entender não é." Erro comum nº 6 do plano. Se a internet do lab for instável, ter um pen drive com 5-6 texturas de cada trilha preparadas (pedra, madeira, metal, concreto, tijolos).</a:t>
             </a:r>
             <a:endParaRPr lang="en-US" dirty="0"/>
           </a:p>
@@ -871,7 +878,7 @@
           <a:p>
             <a:r>
               <a:rPr lang="en-US" dirty="0"/>
-              <a:t>Notas: Erro comum recorrente. Ao adicionar o Image Texture, o estudante às vezes desfaz outros inputs. Verificar no Principled BSDF: Base Color conectado ao Image Texture, Metallic e Roughness com valores não-padrão coerentes com o material (ex: o Roughness 0.85 da pedra calibrado na Semana 5 continua lá?).</a:t>
+              <a:t>Notas: Slide novo desta revisão, endereça a dificuldade nº 7 do plano de aula. Alguns estudantes chegam à Semana 6 sem ter decidido a trilha. Usar o próprio moodboard como critério de decisão. Nenhuma trilha é tecnicamente mais fácil nem vale mais nota — mas para quem não tem boa fotografia disponível, a estilizada reduz o risco de imagem de origem ruim.</a:t>
             </a:r>
             <a:endParaRPr lang="en-US" dirty="0"/>
           </a:p>
@@ -959,7 +966,7 @@
           <a:p>
             <a:r>
               <a:rPr lang="en-US" dirty="0"/>
-              <a:t>Notas: Os três erros mais frequentes da semana, alinhados ao bloco de dificuldades do plano. Circular no estúdio caçando exatamente estes padrões. Para a sombra dura: orientar imagens de dia nublado / iluminação difusa; se a sombra for leve, suavizar com Dodge/Burn ou níveis antes do offset.</a:t>
+              <a:t>Notas: Erro comum nº 5. Escala não é problema do seamless — é de mapeamento. Adicionar nó Mapping (Shift+A &gt; Vector &gt; Mapping) entre Texture Coordinate e Image Texture, ajustar Scale em X e Y. Referência física: uma pedra de parede medieval tem 20-40 cm — quanto isso é em relação ao Asset 01?</a:t>
             </a:r>
             <a:endParaRPr lang="en-US" dirty="0"/>
           </a:p>
@@ -1047,7 +1054,7 @@
           <a:p>
             <a:r>
               <a:rPr lang="en-US" dirty="0"/>
-              <a:t>Notas: Contextualizar o valor profissional. O uso de bibliotecas de textura scaneada é rotina em produção — a habilidade técnica cobrada do artista é curadoria, adaptação e correção de seams, não produção manual de tudo. Amarra à Semana 13/14: a mesma atenção a costura sem descontinuidade volta no tiling de trim sheets.</a:t>
+              <a:t>Notas: Erro comum recorrente. Ao adicionar o Image Texture, o estudante às vezes desfaz outros inputs. Verificar no Principled BSDF: Base Color conectado ao Image Texture, Metallic e Roughness com valores não-padrão coerentes com o material (ex: o Roughness 0.85 da pedra calibrado na Semana 5 continua lá?). Vale para as duas trilhas — o Albedo muda, o restante do material calibrado não.</a:t>
             </a:r>
             <a:endParaRPr lang="en-US" dirty="0"/>
           </a:p>
@@ -1135,7 +1142,7 @@
           <a:p>
             <a:r>
               <a:rPr lang="en-US" dirty="0"/>
-              <a:t>Notas: Amarrar a mini aula. Cada item retorna na demonstração e no estúdio. Não reler tudo — apontar a conexão com a demo (pedra seamless no Krita -&gt; Blender). Lembrar: hoje é crítica INFORMAL; o foco é ler costura e coerência temática no trabalho dos colegas.</a:t>
+              <a:t>Notas: Os três erros mais frequentes da semana, alinhados ao bloco de dificuldades do plano, agora cobrindo as duas trilhas. Circular no estúdio caçando exatamente estes padrões. Para sombra dura: orientar imagens de dia nublado / iluminação difusa; se a sombra for leve, suavizar com Dodge/Burn ou níveis antes do offset. Para pincelada direcional forte na trilha estilizada, o princípio é o mesmo: suavizar antes de aplicar o offset.</a:t>
             </a:r>
             <a:endParaRPr lang="en-US" dirty="0"/>
           </a:p>
@@ -1223,7 +1230,7 @@
           <a:p>
             <a:r>
               <a:rPr lang="en-US" dirty="0"/>
-              <a:t>Notas: Consigna do estúdio (50 min). Se o Asset 01 é parede de pedra medieval, a textura é pedra; se é caixa de metal Sci-Fi, é metal com ferrugem. Amarrar ao moodboard: não é "pedra genérica", é AQUELA pedra do tema. Nomenclatura: [Nome]_[material]_seamless_S06.png. Salvar o .kra nativo com as camadas — vai poupar trabalho na Semana 7.</a:t>
+              <a:t>Notas: Contextualizar o valor profissional. O uso de bibliotecas de textura (escaneada ou pintada) é rotina em produção — a habilidade técnica cobrada do artista é curadoria, adaptação e correção de seams, não produção manual de tudo, em nenhuma das duas trilhas. Amarra à Semana 13/14: a mesma atenção a costura sem descontinuidade volta no tiling de trim sheets.</a:t>
             </a:r>
             <a:endParaRPr lang="en-US" dirty="0"/>
           </a:p>
@@ -1311,7 +1318,271 @@
           <a:p>
             <a:r>
               <a:rPr lang="en-US" dirty="0"/>
-              <a:t>Notas: Transição para a demonstração de 20 min. Sequência: importar foto -&gt; Wrap Around mostra costura -&gt; Offset 50% -&gt; patch com Clone Stamp -&gt; verificar no Wrap Around -&gt; exportar PNG -&gt; Blender: nó Image Texture no Base Color -&gt; comparar com o Albedo plano da Semana 5. Deixar uma costura residual é didaticamente valioso: mostrar o ciclo Krita -&gt; Blender -&gt; Reload.
+              <a:t>Notas: Amarrar a mini aula. Cada item retorna na demonstração e no estúdio. Não reler tudo — apontar a conexão com a demo (pedra seamless no Krita -&gt; Blender, com uma comparação rápida com o caso estilizado ao final). Lembrar: hoje é crítica INFORMAL; o foco é ler costura e coerência temática (e coerência de trilha) no trabalho dos colegas.</a:t>
+            </a:r>
+            <a:endParaRPr lang="en-US" dirty="0"/>
+          </a:p>
+        </p:txBody>
+      </p:sp>
+      <p:sp>
+        <p:nvSpPr>
+          <p:cNvPr id="4" name="Slide Number Placeholder 3"/>
+          <p:cNvSpPr>
+            <a:spLocks noGrp="1"/>
+          </p:cNvSpPr>
+          <p:nvPr>
+            <p:ph type="sldNum" sz="quarter" idx="10"/>
+          </p:nvPr>
+        </p:nvSpPr>
+        <p:spPr/>
+        <p:txBody>
+          <a:bodyPr/>
+          <a:lstStyle/>
+          <a:p>
+            <a:fld id="{F7021451-1387-4CA6-816F-3879F97B5CBC}" type="slidenum">
+              <a:rPr lang="en-US"/>
+              <a:t>18</a:t>
+            </a:fld>
+            <a:endParaRPr lang="en-US"/>
+          </a:p>
+        </p:txBody>
+      </p:sp>
+    </p:spTree>
+    <p:extLst>
+      <p:ext uri="{BB962C8B-B14F-4D97-AF65-F5344CB8AC3E}">
+        <p14:creationId xmlns:p14="http://schemas.microsoft.com/office/powerpoint/2010/main" val="1024086991"/>
+      </p:ext>
+    </p:extLst>
+  </p:cSld>
+  <p:clrMapOvr>
+    <a:masterClrMapping/>
+  </p:clrMapOvr>
+</p:notes>
+</file>
+
+<file path=ppt/notesSlides/notesSlide19.xml><?xml version="1.0" encoding="utf-8"?>
+<p:notes xmlns:a="http://schemas.openxmlformats.org/drawingml/2006/main" xmlns:r="http://schemas.openxmlformats.org/officeDocument/2006/relationships" xmlns:p="http://schemas.openxmlformats.org/presentationml/2006/main">
+  <p:cSld>
+    <p:spTree>
+      <p:nvGrpSpPr>
+        <p:cNvPr id="1" name=""/>
+        <p:cNvGrpSpPr/>
+        <p:nvPr/>
+      </p:nvGrpSpPr>
+      <p:grpSpPr>
+        <a:xfrm>
+          <a:off x="0" y="0"/>
+          <a:ext cx="0" cy="0"/>
+          <a:chOff x="0" y="0"/>
+          <a:chExt cx="0" cy="0"/>
+        </a:xfrm>
+      </p:grpSpPr>
+      <p:sp>
+        <p:nvSpPr>
+          <p:cNvPr id="2" name="Slide Image Placeholder 1"/>
+          <p:cNvSpPr>
+            <a:spLocks noGrp="1" noRot="1" noChangeAspect="1"/>
+          </p:cNvSpPr>
+          <p:nvPr>
+            <p:ph type="sldImg"/>
+          </p:nvPr>
+        </p:nvSpPr>
+        <p:spPr/>
+      </p:sp>
+      <p:sp>
+        <p:nvSpPr>
+          <p:cNvPr id="3" name="Notes Placeholder 2"/>
+          <p:cNvSpPr>
+            <a:spLocks noGrp="1"/>
+          </p:cNvSpPr>
+          <p:nvPr>
+            <p:ph type="body" idx="1"/>
+          </p:nvPr>
+        </p:nvSpPr>
+        <p:spPr/>
+        <p:txBody>
+          <a:bodyPr/>
+          <a:lstStyle/>
+          <a:p>
+            <a:r>
+              <a:rPr lang="en-US" dirty="0"/>
+              <a:t>Notas: Consigna do estúdio (50 min). Se o Asset 01 é parede de pedra medieval, a textura é pedra; se é caixa de metal Sci-Fi, é metal com ferrugem — fotorrealista ou estilizado, conforme a trilha já escolhida. Amarrar ao moodboard: não é "pedra genérica", é AQUELA pedra do tema. Nomenclatura: [Nome]_[material]_seamless_S06.png. Salvar o .kra nativo com as camadas — vai poupar trabalho na Semana 7 (migração para o 3D Coat).</a:t>
+            </a:r>
+            <a:endParaRPr lang="en-US" dirty="0"/>
+          </a:p>
+        </p:txBody>
+      </p:sp>
+      <p:sp>
+        <p:nvSpPr>
+          <p:cNvPr id="4" name="Slide Number Placeholder 3"/>
+          <p:cNvSpPr>
+            <a:spLocks noGrp="1"/>
+          </p:cNvSpPr>
+          <p:nvPr>
+            <p:ph type="sldNum" sz="quarter" idx="10"/>
+          </p:nvPr>
+        </p:nvSpPr>
+        <p:spPr/>
+        <p:txBody>
+          <a:bodyPr/>
+          <a:lstStyle/>
+          <a:p>
+            <a:fld id="{F7021451-1387-4CA6-816F-3879F97B5CBC}" type="slidenum">
+              <a:rPr lang="en-US"/>
+              <a:t>19</a:t>
+            </a:fld>
+            <a:endParaRPr lang="en-US"/>
+          </a:p>
+        </p:txBody>
+      </p:sp>
+    </p:spTree>
+    <p:extLst>
+      <p:ext uri="{BB962C8B-B14F-4D97-AF65-F5344CB8AC3E}">
+        <p14:creationId xmlns:p14="http://schemas.microsoft.com/office/powerpoint/2010/main" val="1024086991"/>
+      </p:ext>
+    </p:extLst>
+  </p:cSld>
+  <p:clrMapOvr>
+    <a:masterClrMapping/>
+  </p:clrMapOvr>
+</p:notes>
+</file>
+
+<file path=ppt/notesSlides/notesSlide2.xml><?xml version="1.0" encoding="utf-8"?>
+<p:notes xmlns:a="http://schemas.openxmlformats.org/drawingml/2006/main" xmlns:r="http://schemas.openxmlformats.org/officeDocument/2006/relationships" xmlns:p="http://schemas.openxmlformats.org/presentationml/2006/main">
+  <p:cSld>
+    <p:spTree>
+      <p:nvGrpSpPr>
+        <p:cNvPr id="1" name=""/>
+        <p:cNvGrpSpPr/>
+        <p:nvPr/>
+      </p:nvGrpSpPr>
+      <p:grpSpPr>
+        <a:xfrm>
+          <a:off x="0" y="0"/>
+          <a:ext cx="0" cy="0"/>
+          <a:chOff x="0" y="0"/>
+          <a:chExt cx="0" cy="0"/>
+        </a:xfrm>
+      </p:grpSpPr>
+      <p:sp>
+        <p:nvSpPr>
+          <p:cNvPr id="2" name="Slide Image Placeholder 1"/>
+          <p:cNvSpPr>
+            <a:spLocks noGrp="1" noRot="1" noChangeAspect="1"/>
+          </p:cNvSpPr>
+          <p:nvPr>
+            <p:ph type="sldImg"/>
+          </p:nvPr>
+        </p:nvSpPr>
+        <p:spPr/>
+      </p:sp>
+      <p:sp>
+        <p:nvSpPr>
+          <p:cNvPr id="3" name="Notes Placeholder 2"/>
+          <p:cNvSpPr>
+            <a:spLocks noGrp="1"/>
+          </p:cNvSpPr>
+          <p:nvPr>
+            <p:ph type="body" idx="1"/>
+          </p:nvPr>
+        </p:nvSpPr>
+        <p:spPr/>
+        <p:txBody>
+          <a:bodyPr/>
+          <a:lstStyle/>
+          <a:p>
+            <a:r>
+              <a:rPr lang="en-US" dirty="0"/>
+              <a:t>Notas: Ler rápido. Cada objetivo retorna ao longo da aula. Não antecipar Normal Map nem geração de mapas via 3D Coat (Semana 7) — hoje só o Albedo deixa de ser cor e passa a ser imagem. Manter os valores de Metallic e Roughness calibrados na Semana 5, em qualquer trilha visual.</a:t>
+            </a:r>
+            <a:endParaRPr lang="en-US" dirty="0"/>
+          </a:p>
+        </p:txBody>
+      </p:sp>
+      <p:sp>
+        <p:nvSpPr>
+          <p:cNvPr id="4" name="Slide Number Placeholder 3"/>
+          <p:cNvSpPr>
+            <a:spLocks noGrp="1"/>
+          </p:cNvSpPr>
+          <p:nvPr>
+            <p:ph type="sldNum" sz="quarter" idx="10"/>
+          </p:nvPr>
+        </p:nvSpPr>
+        <p:spPr/>
+        <p:txBody>
+          <a:bodyPr/>
+          <a:lstStyle/>
+          <a:p>
+            <a:fld id="{F7021451-1387-4CA6-816F-3879F97B5CBC}" type="slidenum">
+              <a:rPr lang="en-US"/>
+              <a:t>2</a:t>
+            </a:fld>
+            <a:endParaRPr lang="en-US"/>
+          </a:p>
+        </p:txBody>
+      </p:sp>
+    </p:spTree>
+    <p:extLst>
+      <p:ext uri="{BB962C8B-B14F-4D97-AF65-F5344CB8AC3E}">
+        <p14:creationId xmlns:p14="http://schemas.microsoft.com/office/powerpoint/2010/main" val="1024086991"/>
+      </p:ext>
+    </p:extLst>
+  </p:cSld>
+  <p:clrMapOvr>
+    <a:masterClrMapping/>
+  </p:clrMapOvr>
+</p:notes>
+</file>
+
+<file path=ppt/notesSlides/notesSlide20.xml><?xml version="1.0" encoding="utf-8"?>
+<p:notes xmlns:a="http://schemas.openxmlformats.org/drawingml/2006/main" xmlns:r="http://schemas.openxmlformats.org/officeDocument/2006/relationships" xmlns:p="http://schemas.openxmlformats.org/presentationml/2006/main">
+  <p:cSld>
+    <p:spTree>
+      <p:nvGrpSpPr>
+        <p:cNvPr id="1" name=""/>
+        <p:cNvGrpSpPr/>
+        <p:nvPr/>
+      </p:nvGrpSpPr>
+      <p:grpSpPr>
+        <a:xfrm>
+          <a:off x="0" y="0"/>
+          <a:ext cx="0" cy="0"/>
+          <a:chOff x="0" y="0"/>
+          <a:chExt cx="0" cy="0"/>
+        </a:xfrm>
+      </p:grpSpPr>
+      <p:sp>
+        <p:nvSpPr>
+          <p:cNvPr id="2" name="Slide Image Placeholder 1"/>
+          <p:cNvSpPr>
+            <a:spLocks noGrp="1" noRot="1" noChangeAspect="1"/>
+          </p:cNvSpPr>
+          <p:nvPr>
+            <p:ph type="sldImg"/>
+          </p:nvPr>
+        </p:nvSpPr>
+        <p:spPr/>
+      </p:sp>
+      <p:sp>
+        <p:nvSpPr>
+          <p:cNvPr id="3" name="Notes Placeholder 2"/>
+          <p:cNvSpPr>
+            <a:spLocks noGrp="1"/>
+          </p:cNvSpPr>
+          <p:nvPr>
+            <p:ph type="body" idx="1"/>
+          </p:nvPr>
+        </p:nvSpPr>
+        <p:spPr/>
+        <p:txBody>
+          <a:bodyPr/>
+          <a:lstStyle/>
+          <a:p>
+            <a:r>
+              <a:rPr lang="en-US" dirty="0"/>
+              <a:t>Notas: Transição para a demonstração de 20 min. Sequência: importar foto -&gt; Wrap Around mostra costura -&gt; Offset 50% -&gt; patch com Clone Stamp -&gt; verificar no Wrap Around -&gt; exportar PNG -&gt; Blender: nó Image Texture no Base Color -&gt; comparar com o Albedo plano da Semana 5 -&gt; fechar mostrando o mesmo processo já aplicado a uma textura pintada estilizada, reforçando que o critério de "está seamless?" é idêntico nas duas trilhas. Deixar uma costura residual é didaticamente valioso: mostrar o ciclo Krita -&gt; Blender -&gt; Reload.
 [!FIGURA]
 Objetivo didático: dar à turma um alvo visual do resultado esperado e antecipar o layout de tela da demonstração.
 Arquivo sugerido: assets/demo_seamless_krita_blender.webp
@@ -1339,7 +1610,7 @@
           <a:p>
             <a:fld id="{F7021451-1387-4CA6-816F-3879F97B5CBC}" type="slidenum">
               <a:rPr lang="en-US"/>
-              <a:t>18</a:t>
+              <a:t>20</a:t>
             </a:fld>
             <a:endParaRPr lang="en-US"/>
           </a:p>
@@ -1358,7 +1629,7 @@
 </p:notes>
 </file>
 
-<file path=ppt/notesSlides/notesSlide2.xml><?xml version="1.0" encoding="utf-8"?>
+<file path=ppt/notesSlides/notesSlide3.xml><?xml version="1.0" encoding="utf-8"?>
 <p:notes xmlns:a="http://schemas.openxmlformats.org/drawingml/2006/main" xmlns:r="http://schemas.openxmlformats.org/officeDocument/2006/relationships" xmlns:p="http://schemas.openxmlformats.org/presentationml/2006/main">
   <p:cSld>
     <p:spTree>
@@ -1404,7 +1675,7 @@
           <a:p>
             <a:r>
               <a:rPr lang="en-US" dirty="0"/>
-              <a:t>Notas: Ler rápido. Cada objetivo retorna ao longo da aula. Não antecipar Normal Map nem Roughness mapeado (Semana 7) — hoje só o Albedo deixa de ser cor e passa a ser imagem. Manter os valores de Metallic e Roughness calibrados na Semana 5.</a:t>
+              <a:t>Notas: Slide novo desta revisão. A partir de hoje cada estudante começa a definir se o Hero Asset persegue fotorrealismo ou estilização. Deixar claro que o requisito técnico de seamless (continuidade de borda) é idêntico nas duas — a diferença é só de onde vem a imagem e, mais adiante (Semana 7), como o material entra no 3D Coat. Se algum estudante estiver em dúvida, adiantar que existe um slide de apoio para essa decisão mais à frente na aula.</a:t>
             </a:r>
             <a:endParaRPr lang="en-US" dirty="0"/>
           </a:p>
@@ -1427,7 +1698,7 @@
           <a:p>
             <a:fld id="{F7021451-1387-4CA6-816F-3879F97B5CBC}" type="slidenum">
               <a:rPr lang="en-US"/>
-              <a:t>2</a:t>
+              <a:t>3</a:t>
             </a:fld>
             <a:endParaRPr lang="en-US"/>
           </a:p>
@@ -1446,7 +1717,7 @@
 </p:notes>
 </file>
 
-<file path=ppt/notesSlides/notesSlide3.xml><?xml version="1.0" encoding="utf-8"?>
+<file path=ppt/notesSlides/notesSlide4.xml><?xml version="1.0" encoding="utf-8"?>
 <p:notes xmlns:a="http://schemas.openxmlformats.org/drawingml/2006/main" xmlns:r="http://schemas.openxmlformats.org/officeDocument/2006/relationships" xmlns:p="http://schemas.openxmlformats.org/presentationml/2006/main">
   <p:cSld>
     <p:spTree>
@@ -1515,7 +1786,7 @@
           <a:p>
             <a:fld id="{F7021451-1387-4CA6-816F-3879F97B5CBC}" type="slidenum">
               <a:rPr lang="en-US"/>
-              <a:t>3</a:t>
+              <a:t>4</a:t>
             </a:fld>
             <a:endParaRPr lang="en-US"/>
           </a:p>
@@ -1534,7 +1805,7 @@
 </p:notes>
 </file>
 
-<file path=ppt/notesSlides/notesSlide4.xml><?xml version="1.0" encoding="utf-8"?>
+<file path=ppt/notesSlides/notesSlide5.xml><?xml version="1.0" encoding="utf-8"?>
 <p:notes xmlns:a="http://schemas.openxmlformats.org/drawingml/2006/main" xmlns:r="http://schemas.openxmlformats.org/officeDocument/2006/relationships" xmlns:p="http://schemas.openxmlformats.org/presentationml/2006/main">
   <p:cSld>
     <p:spTree>
@@ -1608,7 +1879,7 @@
           <a:p>
             <a:fld id="{F7021451-1387-4CA6-816F-3879F97B5CBC}" type="slidenum">
               <a:rPr lang="en-US"/>
-              <a:t>4</a:t>
+              <a:t>5</a:t>
             </a:fld>
             <a:endParaRPr lang="en-US"/>
           </a:p>
@@ -1627,7 +1898,7 @@
 </p:notes>
 </file>
 
-<file path=ppt/notesSlides/notesSlide5.xml><?xml version="1.0" encoding="utf-8"?>
+<file path=ppt/notesSlides/notesSlide6.xml><?xml version="1.0" encoding="utf-8"?>
 <p:notes xmlns:a="http://schemas.openxmlformats.org/drawingml/2006/main" xmlns:r="http://schemas.openxmlformats.org/officeDocument/2006/relationships" xmlns:p="http://schemas.openxmlformats.org/presentationml/2006/main">
   <p:cSld>
     <p:spTree>
@@ -1673,7 +1944,7 @@
           <a:p>
             <a:r>
               <a:rPr lang="en-US" dirty="0"/>
-              <a:t>Notas: Fixar o conceito central. Superfícies grandes de jogo são maiores que uma única tile. Usar textura pequena repetida é a opção mais eficiente em memória — mas exige seamless. A alternativa (textura única cobrindo tudo) existe, mas não escala para um kit modular. Amarrar ao Projeto Integrador: o kit precisa de superfícies amplas coerentes.</a:t>
+              <a:t>Notas: Fixar o conceito central. Superfícies grandes de jogo são maiores que uma única tile. Usar textura pequena repetida é a opção mais eficiente em memória — mas exige seamless. A alternativa (textura única cobrindo tudo) existe, mas não escala para um kit modular. O requisito técnico de continuidade de borda é o mesmo independentemente da trilha visual (fotorrealista ou estilizada). Amarrar ao Projeto Integrador: o kit precisa de superfícies amplas coerentes.</a:t>
             </a:r>
             <a:endParaRPr lang="en-US" dirty="0"/>
           </a:p>
@@ -1696,7 +1967,7 @@
           <a:p>
             <a:fld id="{F7021451-1387-4CA6-816F-3879F97B5CBC}" type="slidenum">
               <a:rPr lang="en-US"/>
-              <a:t>5</a:t>
+              <a:t>6</a:t>
             </a:fld>
             <a:endParaRPr lang="en-US"/>
           </a:p>
@@ -1715,7 +1986,7 @@
 </p:notes>
 </file>
 
-<file path=ppt/notesSlides/notesSlide6.xml><?xml version="1.0" encoding="utf-8"?>
+<file path=ppt/notesSlides/notesSlide7.xml><?xml version="1.0" encoding="utf-8"?>
 <p:notes xmlns:a="http://schemas.openxmlformats.org/drawingml/2006/main" xmlns:r="http://schemas.openxmlformats.org/officeDocument/2006/relationships" xmlns:p="http://schemas.openxmlformats.org/presentationml/2006/main">
   <p:cSld>
     <p:spTree>
@@ -1761,7 +2032,7 @@
           <a:p>
             <a:r>
               <a:rPr lang="en-US" dirty="0"/>
-              <a:t>Notas: O ponto-chave que motiva o método. A costura não é falha de conteúdo — é diferença entre as bordas. Por isso capturar em iluminação difusa (dia nublado) é tão importante: sombras duras criam costuras que "giram" com o tile e não se corrigem por offset simples. Preparar o terreno para a solução: offset.</a:t>
+              <a:t>Notas: O ponto-chave que motiva o método, agora válido para as duas trilhas. A costura não é falha de conteúdo — é diferença entre as bordas. Por isso capturar em iluminação difusa (dia nublado) é tão importante na trilha fotorrealista: sombras duras criam costuras que "giram" com o tile e não se corrigem por offset simples. Na trilha estilizada, o equivalente é uma pincelada que não foi pensada para repetir. Preparar o terreno para a solução: offset.</a:t>
             </a:r>
             <a:endParaRPr lang="en-US" dirty="0"/>
           </a:p>
@@ -1784,7 +2055,7 @@
           <a:p>
             <a:fld id="{F7021451-1387-4CA6-816F-3879F97B5CBC}" type="slidenum">
               <a:rPr lang="en-US"/>
-              <a:t>6</a:t>
+              <a:t>7</a:t>
             </a:fld>
             <a:endParaRPr lang="en-US"/>
           </a:p>
@@ -1803,7 +2074,7 @@
 </p:notes>
 </file>
 
-<file path=ppt/notesSlides/notesSlide7.xml><?xml version="1.0" encoding="utf-8"?>
+<file path=ppt/notesSlides/notesSlide8.xml><?xml version="1.0" encoding="utf-8"?>
 <p:notes xmlns:a="http://schemas.openxmlformats.org/drawingml/2006/main" xmlns:r="http://schemas.openxmlformats.org/officeDocument/2006/relationships" xmlns:p="http://schemas.openxmlformats.org/presentationml/2006/main">
   <p:cSld>
     <p:spTree>
@@ -1849,7 +2120,7 @@
           <a:p>
             <a:r>
               <a:rPr lang="en-US" dirty="0"/>
-              <a:t>Notas: Explicar o coração do processo. O offset não conserta nada sozinho — ele TRAZ o problema para onde conseguimos vê-lo e pintar. As bordas passam a ser contínuas; o trabalho de patch acontece no centro. No Krita: Filter &gt; Transform &gt; Offset, 50% em cada eixo.
+              <a:t>Notas: Explicar o coração do processo. O offset não conserta nada sozinho — ele TRAZ o problema para onde conseguimos vê-lo e pintar. As bordas passam a ser contínuas; o trabalho de patch acontece no centro. No Krita: Filter &gt; Transform &gt; Offset, 50% em cada eixo. O método é idêntico nas duas trilhas visuais — só muda o que se pinta por cima (clone de pixels reais vs. continuação de pinceladas).
 [!FIGURA]
 Objetivo didático: tornar visível a lógica do offset — o problema não some, ele muda de lugar para poder ser corrigido.
 Arquivo sugerido: assets/offset_traz_costura_ao_centro.webp
@@ -1877,7 +2148,7 @@
           <a:p>
             <a:fld id="{F7021451-1387-4CA6-816F-3879F97B5CBC}" type="slidenum">
               <a:rPr lang="en-US"/>
-              <a:t>7</a:t>
+              <a:t>8</a:t>
             </a:fld>
             <a:endParaRPr lang="en-US"/>
           </a:p>
@@ -1896,94 +2167,6 @@
 </p:notes>
 </file>
 
-<file path=ppt/notesSlides/notesSlide8.xml><?xml version="1.0" encoding="utf-8"?>
-<p:notes xmlns:a="http://schemas.openxmlformats.org/drawingml/2006/main" xmlns:r="http://schemas.openxmlformats.org/officeDocument/2006/relationships" xmlns:p="http://schemas.openxmlformats.org/presentationml/2006/main">
-  <p:cSld>
-    <p:spTree>
-      <p:nvGrpSpPr>
-        <p:cNvPr id="1" name=""/>
-        <p:cNvGrpSpPr/>
-        <p:nvPr/>
-      </p:nvGrpSpPr>
-      <p:grpSpPr>
-        <a:xfrm>
-          <a:off x="0" y="0"/>
-          <a:ext cx="0" cy="0"/>
-          <a:chOff x="0" y="0"/>
-          <a:chExt cx="0" cy="0"/>
-        </a:xfrm>
-      </p:grpSpPr>
-      <p:sp>
-        <p:nvSpPr>
-          <p:cNvPr id="2" name="Slide Image Placeholder 1"/>
-          <p:cNvSpPr>
-            <a:spLocks noGrp="1" noRot="1" noChangeAspect="1"/>
-          </p:cNvSpPr>
-          <p:nvPr>
-            <p:ph type="sldImg"/>
-          </p:nvPr>
-        </p:nvSpPr>
-        <p:spPr/>
-      </p:sp>
-      <p:sp>
-        <p:nvSpPr>
-          <p:cNvPr id="3" name="Notes Placeholder 2"/>
-          <p:cNvSpPr>
-            <a:spLocks noGrp="1"/>
-          </p:cNvSpPr>
-          <p:nvPr>
-            <p:ph type="body" idx="1"/>
-          </p:nvPr>
-        </p:nvSpPr>
-        <p:spPr/>
-        <p:txBody>
-          <a:bodyPr/>
-          <a:lstStyle/>
-          <a:p>
-            <a:r>
-              <a:rPr lang="en-US" dirty="0"/>
-              <a:t>Notas: O erro nº 1 do estúdio. Clonar em linha reta cria um novo padrão repetitivo. Orientar pinceladas diagonais e irregulares, seguindo a textura do material. O Smudge suaviza os limites do patch. Mostrar isso ao vivo na demonstração com o Wrap Around ativo.</a:t>
-            </a:r>
-            <a:endParaRPr lang="en-US" dirty="0"/>
-          </a:p>
-        </p:txBody>
-      </p:sp>
-      <p:sp>
-        <p:nvSpPr>
-          <p:cNvPr id="4" name="Slide Number Placeholder 3"/>
-          <p:cNvSpPr>
-            <a:spLocks noGrp="1"/>
-          </p:cNvSpPr>
-          <p:nvPr>
-            <p:ph type="sldNum" sz="quarter" idx="10"/>
-          </p:nvPr>
-        </p:nvSpPr>
-        <p:spPr/>
-        <p:txBody>
-          <a:bodyPr/>
-          <a:lstStyle/>
-          <a:p>
-            <a:fld id="{F7021451-1387-4CA6-816F-3879F97B5CBC}" type="slidenum">
-              <a:rPr lang="en-US"/>
-              <a:t>8</a:t>
-            </a:fld>
-            <a:endParaRPr lang="en-US"/>
-          </a:p>
-        </p:txBody>
-      </p:sp>
-    </p:spTree>
-    <p:extLst>
-      <p:ext uri="{BB962C8B-B14F-4D97-AF65-F5344CB8AC3E}">
-        <p14:creationId xmlns:p14="http://schemas.microsoft.com/office/powerpoint/2010/main" val="1024086991"/>
-      </p:ext>
-    </p:extLst>
-  </p:cSld>
-  <p:clrMapOvr>
-    <a:masterClrMapping/>
-  </p:clrMapOvr>
-</p:notes>
-</file>
-
 <file path=ppt/notesSlides/notesSlide9.xml><?xml version="1.0" encoding="utf-8"?>
 <p:notes xmlns:a="http://schemas.openxmlformats.org/drawingml/2006/main" xmlns:r="http://schemas.openxmlformats.org/officeDocument/2006/relationships" xmlns:p="http://schemas.openxmlformats.org/presentationml/2006/main">
   <p:cSld>
@@ -2030,12 +2213,7 @@
           <a:p>
             <a:r>
               <a:rPr lang="en-US" dirty="0"/>
-              <a:t>Notas: O Wrap Around (W) é o único feedback confiável em tempo real — o estudante vê a costura ANTES de ir para o Blender. Erro comum nº 2: o PNG isolado parece perfeito, mas a costura só aparece quando tilea. Insistir no uso do Wrap Around durante todo o processo, não só no fim. A régua do "bom o suficiente" é uma decisão artística, não técnica.
-[!FIGURA]
-Objetivo didático: mostrar como o Wrap Around revela costuras que são invisíveis na imagem isolada.
-Arquivo sugerido: assets/krita_wrap_around.webp
-Descrição: captura de tela do Krita com uma textura de pedra em modo Wrap Around ativo, exibindo a repetição em grade 3x3. Uma costura residual aparece destacada por um círculo vermelho anotado.
-Como produzir: no Krita, abrir uma textura de pedra parcialmente tratada, pressionar W para ativar o Wrap Around, dar zoom out até ver a repetição em grade. Capturar a tela e anotar a costura residual com um círculo no próprio Krita.</a:t>
+              <a:t>Notas: O erro nº 1 do estúdio. Clonar em linha reta cria um novo padrão repetitivo. Orientar pinceladas diagonais e irregulares, seguindo a textura do material. O Smudge suaviza os limites do patch. Mostrar isso ao vivo na demonstração com o Wrap Around ativo. Para quem estiver criando uma textura estilizada do zero (sem foto de origem), os pincéis padrão do Krita com textura de papel/canvas ajudam a manter o resultado coerente com um universo pintado.</a:t>
             </a:r>
             <a:endParaRPr lang="en-US" dirty="0"/>
           </a:p>
@@ -2774,9 +2952,87 @@
 </p:sld>
 </file>
 
+<file path=ppt/slides/slide19.xml><?xml version="1.0" encoding="utf-8"?>
+<p:sld xmlns:a="http://schemas.openxmlformats.org/drawingml/2006/main" xmlns:r="http://schemas.openxmlformats.org/officeDocument/2006/relationships" xmlns:p="http://schemas.openxmlformats.org/presentationml/2006/main">
+  <p:cSld name="Slide 19">
+    <p:bg>
+      <p:bgPr>
+        <a:blipFill dpi="0" rotWithShape="1">
+          <a:blip r:embed="rId1">
+            <a:lum/>
+          </a:blip>
+          <a:srcRect/>
+          <a:stretch>
+            <a:fillRect/>
+          </a:stretch>
+        </a:blipFill>
+        <a:effectLst/>
+      </p:bgPr>
+    </p:bg>
+    <p:spTree>
+      <p:nvGrpSpPr>
+        <p:cNvPr id="1" name=""/>
+        <p:cNvGrpSpPr/>
+        <p:nvPr/>
+      </p:nvGrpSpPr>
+      <p:grpSpPr>
+        <a:xfrm>
+          <a:off x="0" y="0"/>
+          <a:ext cx="0" cy="0"/>
+          <a:chOff x="0" y="0"/>
+          <a:chExt cx="0" cy="0"/>
+        </a:xfrm>
+      </p:grpSpPr>
+    </p:spTree>
+  </p:cSld>
+  <p:clrMapOvr>
+    <a:masterClrMapping/>
+  </p:clrMapOvr>
+</p:sld>
+</file>
+
 <file path=ppt/slides/slide2.xml><?xml version="1.0" encoding="utf-8"?>
 <p:sld xmlns:a="http://schemas.openxmlformats.org/drawingml/2006/main" xmlns:r="http://schemas.openxmlformats.org/officeDocument/2006/relationships" xmlns:p="http://schemas.openxmlformats.org/presentationml/2006/main">
   <p:cSld name="Slide 2">
+    <p:bg>
+      <p:bgPr>
+        <a:blipFill dpi="0" rotWithShape="1">
+          <a:blip r:embed="rId1">
+            <a:lum/>
+          </a:blip>
+          <a:srcRect/>
+          <a:stretch>
+            <a:fillRect/>
+          </a:stretch>
+        </a:blipFill>
+        <a:effectLst/>
+      </p:bgPr>
+    </p:bg>
+    <p:spTree>
+      <p:nvGrpSpPr>
+        <p:cNvPr id="1" name=""/>
+        <p:cNvGrpSpPr/>
+        <p:nvPr/>
+      </p:nvGrpSpPr>
+      <p:grpSpPr>
+        <a:xfrm>
+          <a:off x="0" y="0"/>
+          <a:ext cx="0" cy="0"/>
+          <a:chOff x="0" y="0"/>
+          <a:chExt cx="0" cy="0"/>
+        </a:xfrm>
+      </p:grpSpPr>
+    </p:spTree>
+  </p:cSld>
+  <p:clrMapOvr>
+    <a:masterClrMapping/>
+  </p:clrMapOvr>
+</p:sld>
+</file>
+
+<file path=ppt/slides/slide20.xml><?xml version="1.0" encoding="utf-8"?>
+<p:sld xmlns:a="http://schemas.openxmlformats.org/drawingml/2006/main" xmlns:r="http://schemas.openxmlformats.org/officeDocument/2006/relationships" xmlns:p="http://schemas.openxmlformats.org/presentationml/2006/main">
+  <p:cSld name="Slide 20">
     <p:bg>
       <p:bgPr>
         <a:blipFill dpi="0" rotWithShape="1">

--- a/Slides/Semana 6/semana_6_slides.pptx
+++ b/Slides/Semana 6/semana_6_slides.pptx
@@ -521,7 +521,7 @@
           <a:p>
             <a:r>
               <a:rPr lang="en-US" dirty="0"/>
-              <a:t>Notas: Abertura da mini aula (20 min). Unidade II, entre a crítica formal da Semana 5 e a CF2 (Semana 8). Mensagem central no subtítulo: a costura de uma textura não é falta de talento artístico — é uma imagem cujas bordas não são contínuas. Marco da semana: pela primeira vez uma IMAGEM REAL entra no pipeline (fotografada OU pintada, dependendo da trilha visual do estudante). Nas Semanas 3-5 o Albedo era cor plana; agora vira uma superfície com variação e história. Não é tutorial de cliques: é entender por que a repetição precisa ser invisível — em qualquer trilha.</a:t>
+              <a:t>Notas: Marcar a virada da semana: pela primeira vez uma imagem real entra no pipeline — o Albedo deixa de ser cor sólida e passa a ser textura. Também é a semana em que cada estudante começa a declarar sua trilha visual (fotorrealista ou estilizada). Sem crítica formal — a próxima é a CF2, na Semana 8.</a:t>
             </a:r>
             <a:endParaRPr lang="en-US" dirty="0"/>
           </a:p>
@@ -609,12 +609,7 @@
           <a:p>
             <a:r>
               <a:rPr lang="en-US" dirty="0"/>
-              <a:t>Notas: O Wrap Around (W) é o único feedback confiável em tempo real — o estudante vê a costura ANTES de ir para o Blender, na trilha fotorrealista ou na estilizada. Erro comum nº 2: o PNG isolado parece perfeito, mas a costura só aparece quando tilea. Insistir no uso do Wrap Around durante todo o processo, não só no fim. A régua do "bom o suficiente" é uma decisão artística, não técnica.
-[!FIGURA]
-Objetivo didático: mostrar como o Wrap Around revela costuras que são invisíveis na imagem isolada.
-Arquivo sugerido: assets/krita_wrap_around.webp
-Descrição: captura de tela do Krita com uma textura de pedra em modo Wrap Around ativo, exibindo a repetição em grade 3x3. Uma costura residual aparece destacada por um círculo vermelho anotado.
-Como produzir: no Krita, abrir uma textura de pedra parcialmente tratada, pressionar W para ativar o Wrap Around, dar zoom out até ver a repetição em grade. Capturar a tela e anotar a costura residual com um círculo no próprio Krita.</a:t>
+              <a:t>Notas: Para a trilha estilizada, frequentemente só o Albedo vem pronto — Roughness/Metallic precisam ser calibrados manualmente, como já foi feito na Semana 5.</a:t>
             </a:r>
             <a:endParaRPr lang="en-US" dirty="0"/>
           </a:p>
@@ -702,7 +697,7 @@
           <a:p>
             <a:r>
               <a:rPr lang="en-US" dirty="0"/>
-              <a:t>Notas: Núcleo procedimental da semana. O ciclo Krita -&gt; Blender vai se repetir várias vezes no estúdio — é normal, nas duas trilhas visuais. Reforçar o loop C-&gt;D-&gt;C: verificar no Wrap Around, voltar ao patch se houver costura. O GitHub Action converte o bloco mermaid em imagem automaticamente.</a:t>
+              <a:t>Notas: Amarrar a C4 (Materiais PBR) e C2 (Direção Artística) — coerência da textura com o universo do kit e com a trilha visual escolhida.</a:t>
             </a:r>
             <a:endParaRPr lang="en-US" dirty="0"/>
           </a:p>
@@ -790,7 +785,7 @@
           <a:p>
             <a:r>
               <a:rPr lang="en-US" dirty="0"/>
-              <a:t>Notas: Deixar claro que baixar textura pronta NÃO isenta de entender o seamless, em nenhuma trilha. Se o estudante baixa do Poly Haven ou de um banco estilizado, precisa documentar por que é seamless (apontar continuidade de bordas no Wrap Around) e adaptar cor/detalhe ao tema. "Baixar é válido. Entregar sem entender não é." Erro comum nº 6 do plano. Se a internet do lab for instável, ter um pen drive com 5-6 texturas de cada trilha preparadas (pedra, madeira, metal, concreto, tijolos).</a:t>
+              <a:t>Notas: Fechar a mini aula amarrando os conceitos antes da demonstração.</a:t>
             </a:r>
             <a:endParaRPr lang="en-US" dirty="0"/>
           </a:p>
@@ -878,7 +873,12 @@
           <a:p>
             <a:r>
               <a:rPr lang="en-US" dirty="0"/>
-              <a:t>Notas: Slide novo desta revisão, endereça a dificuldade nº 7 do plano de aula. Alguns estudantes chegam à Semana 6 sem ter decidido a trilha. Usar o próprio moodboard como critério de decisão. Nenhuma trilha é tecnicamente mais fácil nem vale mais nota — mas para quem não tem boa fotografia disponível, a estilizada reduz o risco de imagem de origem ruim.</a:t>
+              <a:t>Notas: Transição para os 20 min de demonstração: Krita (offset, Clone Stamp, Wrap Around, exportação) → Blender (nó Image Texture → Base Color) → comparação rápida com uma textura estilizada já preparada, mostrando que o processo é idêntico.
+[!FIGURA]
+Objetivo didático — Mostrar as etapas do processo de offset+patch no Krita, da foto bruta ao resultado seamless.
+Arquivo sugerido — assets/demo_krita_offset_patch.webp
+Descrição — Sequência de 3 capturas de tela do Krita lado a lado: (1) foto bruta com Wrap Around ativado mostrando costuras nas bordas, (2) a mesma imagem após o offset de 50%/50% com as costuras agora cruzando o centro, (3) resultado final após o patch com Clone Stamp, sem costuras visíveis no Wrap Around.
+Como produzir — Capturar no Krita usando a fotografia de pedra de demonstração do professor, salvando as três etapas do mesmo arquivo.</a:t>
             </a:r>
             <a:endParaRPr lang="en-US" dirty="0"/>
           </a:p>
@@ -966,7 +966,7 @@
           <a:p>
             <a:r>
               <a:rPr lang="en-US" dirty="0"/>
-              <a:t>Notas: Erro comum nº 5. Escala não é problema do seamless — é de mapeamento. Adicionar nó Mapping (Shift+A &gt; Vector &gt; Mapping) entre Texture Coordinate e Image Texture, ajustar Scale em X e Y. Referência física: uma pedra de parede medieval tem 20-40 cm — quanto isso é em relação ao Asset 01?</a:t>
+              <a:t>Notas: Divisória entre a mini aula e o estúdio. Os slides a seguir ficam projetados durante a produção — servem de consigna e timebox visíveis, apresentados um a um conforme a etapa correspondente começa.</a:t>
             </a:r>
             <a:endParaRPr lang="en-US" dirty="0"/>
           </a:p>
@@ -1054,7 +1054,7 @@
           <a:p>
             <a:r>
               <a:rPr lang="en-US" dirty="0"/>
-              <a:t>Notas: Erro comum recorrente. Ao adicionar o Image Texture, o estudante às vezes desfaz outros inputs. Verificar no Principled BSDF: Base Color conectado ao Image Texture, Metallic e Roughness com valores não-padrão coerentes com o material (ex: o Roughness 0.85 da pedra calibrado na Semana 5 continua lá?). Vale para as duas trilhas — o Albedo muda, o restante do material calibrado não.</a:t>
+              <a:t>Notas: Encontro 1. A escolha de trilha (fotorrealista ou estilizada) deve ser coerente com o moodboard do kit. Circular perguntando: "essa textura poderia existir no universo do seu kit?"</a:t>
             </a:r>
             <a:endParaRPr lang="en-US" dirty="0"/>
           </a:p>
@@ -1142,7 +1142,7 @@
           <a:p>
             <a:r>
               <a:rPr lang="en-US" dirty="0"/>
-              <a:t>Notas: Os três erros mais frequentes da semana, alinhados ao bloco de dificuldades do plano, agora cobrindo as duas trilhas. Circular no estúdio caçando exatamente estes padrões. Para sombra dura: orientar imagens de dia nublado / iluminação difusa; se a sombra for leve, suavizar com Dodge/Burn ou níveis antes do offset. Para pincelada direcional forte na trilha estilizada, o princípio é o mesmo: suavizar antes de aplicar o offset.</a:t>
+              <a:t>Notas: Circular verificando três pontos: a textura está seamless (Wrap Around), Metallic/Roughness preservados, e a escala da textura coerente com o asset (nó Mapping se necessário).</a:t>
             </a:r>
             <a:endParaRPr lang="en-US" dirty="0"/>
           </a:p>
@@ -1230,7 +1230,7 @@
           <a:p>
             <a:r>
               <a:rPr lang="en-US" dirty="0"/>
-              <a:t>Notas: Contextualizar o valor profissional. O uso de bibliotecas de textura (escaneada ou pintada) é rotina em produção — a habilidade técnica cobrada do artista é curadoria, adaptação e correção de seams, não produção manual de tudo, em nenhuma das duas trilhas. Amarra à Semana 13/14: a mesma atenção a costura sem descontinuidade volta no tiling de trim sheets.</a:t>
+              <a:t>Notas: Abertura do Encontro 2. Perguntar à turma: "alguém consegue ver onde termina um tile e começa outro?" Fechar nomeando o erro de seamless mais comum observado (tipicamente patch em linha reta) e o estado geral de coerência temática da turma.</a:t>
             </a:r>
             <a:endParaRPr lang="en-US" dirty="0"/>
           </a:p>
@@ -1318,7 +1318,7 @@
           <a:p>
             <a:r>
               <a:rPr lang="en-US" dirty="0"/>
-              <a:t>Notas: Amarrar a mini aula. Cada item retorna na demonstração e no estúdio. Não reler tudo — apontar a conexão com a demo (pedra seamless no Krita -&gt; Blender, com uma comparação rápida com o caso estilizado ao final). Lembrar: hoje é crítica INFORMAL; o foco é ler costura e coerência temática (e coerência de trilha) no trabalho dos colegas.</a:t>
+              <a:t>Notas: Para quem precisar. Perguntar: "o que mudou com o patch? mostra no Wrap Around antes e depois" — estimula verbalização do processo para C1.</a:t>
             </a:r>
             <a:endParaRPr lang="en-US" dirty="0"/>
           </a:p>
@@ -1406,7 +1406,7 @@
           <a:p>
             <a:r>
               <a:rPr lang="en-US" dirty="0"/>
-              <a:t>Notas: Consigna do estúdio (50 min). Se o Asset 01 é parede de pedra medieval, a textura é pedra; se é caixa de metal Sci-Fi, é metal com ferrugem — fotorrealista ou estilizado, conforme a trilha já escolhida. Amarrar ao moodboard: não é "pedra genérica", é AQUELA pedra do tema. Nomenclatura: [Nome]_[material]_seamless_S06.png. Salvar o .kra nativo com as camadas — vai poupar trabalho na Semana 7 (migração para o 3D Coat).</a:t>
+              <a:t>Notas: Não é obrigatório terminar tudo — o objetivo é sair da semana com domínio real do fluxo Krita → Blender. Perguntar: "esse segundo material é fisicamente diferente do primeiro? o Roughness dele deveria ser igual?"</a:t>
             </a:r>
             <a:endParaRPr lang="en-US" dirty="0"/>
           </a:p>
@@ -1494,7 +1494,7 @@
           <a:p>
             <a:r>
               <a:rPr lang="en-US" dirty="0"/>
-              <a:t>Notas: Ler rápido. Cada objetivo retorna ao longo da aula. Não antecipar Normal Map nem geração de mapas via 3D Coat (Semana 7) — hoje só o Albedo deixa de ser cor e passa a ser imagem. Manter os valores de Metallic e Roughness calibrados na Semana 5, em qualquer trilha visual.</a:t>
+              <a:t>Notas: Recapitular em uma frase. Não reabrir o conteúdo técnico de PBR da Semana 5 (Albedo/Metallic/Roughness) — isso já foi ensinado. Só situar a transição.</a:t>
             </a:r>
             <a:endParaRPr lang="en-US" dirty="0"/>
           </a:p>
@@ -1582,12 +1582,7 @@
           <a:p>
             <a:r>
               <a:rPr lang="en-US" dirty="0"/>
-              <a:t>Notas: Transição para a demonstração de 20 min. Sequência: importar foto -&gt; Wrap Around mostra costura -&gt; Offset 50% -&gt; patch com Clone Stamp -&gt; verificar no Wrap Around -&gt; exportar PNG -&gt; Blender: nó Image Texture no Base Color -&gt; comparar com o Albedo plano da Semana 5 -&gt; fechar mostrando o mesmo processo já aplicado a uma textura pintada estilizada, reforçando que o critério de "está seamless?" é idêntico nas duas trilhas. Deixar uma costura residual é didaticamente valioso: mostrar o ciclo Krita -&gt; Blender -&gt; Reload.
-[!FIGURA]
-Objetivo didático: dar à turma um alvo visual do resultado esperado e antecipar o layout de tela da demonstração.
-Arquivo sugerido: assets/demo_seamless_krita_blender.webp
-Descrição: tela dividida. À esquerda, o Krita com uma textura de pedra em Wrap Around (repetição em grade sem costuras). À direita, o Blender em Viewport Rendered com o Asset 01 recebendo a mesma textura de pedra no canal Albedo, sob HDRI neutra.
-Como produzir: no Krita, finalizar uma pedra seamless e ativar o Wrap Around. No Blender, aplicar o PNG exportado ao Base Color do Principled BSDF do Asset 01 em Viewport Rendered. Capturar as duas telas e compô-las lado a lado no Krita.</a:t>
+              <a:t>Notas: Fechamento (10 min): "O Albedo do Hero Asset não é mais uma cor — é uma superfície com história." Ponte: na Semana 7 a ferramenta muda para o 3D Coat, com bake de AO/Curvature/Normal direto da malha — quem está na trilha fotorrealista reforça o desgaste sobre a textura de hoje; quem está na estilizada usa os mesmos mapas como máscara para Smart Materials.</a:t>
             </a:r>
             <a:endParaRPr lang="en-US" dirty="0"/>
           </a:p>
@@ -1675,7 +1670,7 @@
           <a:p>
             <a:r>
               <a:rPr lang="en-US" dirty="0"/>
-              <a:t>Notas: Slide novo desta revisão. A partir de hoje cada estudante começa a definir se o Hero Asset persegue fotorrealismo ou estilização. Deixar claro que o requisito técnico de seamless (continuidade de borda) é idêntico nas duas — a diferença é só de onde vem a imagem e, mais adiante (Semana 7), como o material entra no 3D Coat. Se algum estudante estiver em dúvida, adiantar que existe um slide de apoio para essa decisão mais à frente na aula.</a:t>
+              <a:t>Notas: Os dois primeiros objetivos são conceituais (mini aula); os três últimos são o trabalho prático do estúdio de hoje.</a:t>
             </a:r>
             <a:endParaRPr lang="en-US" dirty="0"/>
           </a:p>
@@ -1763,7 +1758,7 @@
           <a:p>
             <a:r>
               <a:rPr lang="en-US" dirty="0"/>
-              <a:t>Notas: Abertura da mini aula — os 5 primeiros minutos, antes de entrar no conteúdo novo de textura seamless. Mostrar rapidamente (ou descrever com uma imagem, se o add-on não estiver instalado no laboratório) a diferença de aproveitamento de espaço entre um Pack Islands nativo e um empacotamento via UVPackmaster no mesmo asset — reaproveitar o mesmo asset de demonstração da Semana 4, se possível. Não é essencial ter o add-on instalado: se indisponível, mencionar apenas verbalmente. Fechar com a pergunta do slide e seguir para o conteúdo novo da semana.</a:t>
+              <a:t>Notas: Recapitulação rápida de 5 min antes do conteúdo novo. Se o add-on não estiver disponível no laboratório, mencionar apenas verbalmente com uma imagem comparativa — não é essencial para a semana.</a:t>
             </a:r>
             <a:endParaRPr lang="en-US" dirty="0"/>
           </a:p>
@@ -1851,12 +1846,12 @@
           <a:p>
             <a:r>
               <a:rPr lang="en-US" dirty="0"/>
-              <a:t>Notas: Abrir com esta pergunta usando a imagem estática de comparação no projetor (sem abrir software ainda). Aguardar 2-3 respostas — o objetivo é que a turma IDENTIFIQUE a costura antes de nomear o conceito. Vão dizer "tem uma linha", "a pedra se repete igual". Confirmar e revelar o conceito no slide seguinte.
+              <a:t>Notas: Mostrar duas imagens estáticas lado a lado (sem abrir software ainda): a mesma parede de pedra, uma com textura repetida sem tratamento (costuras visíveis) e outra já seamless. Perguntar "o que está diferente? onde está o problema?" e aguardar 2-3 respostas antes de nomear "costura".
 [!FIGURA]
-Objetivo didático: provocar a turma a enxergar a costura por conta própria, ancorando o conceito na percepção antes da definição.
-Arquivo sugerido: assets/parede_costura_vs_seamless.webp
-Descrição: uma parede de jogo em duas versões lado a lado. À esquerda, uma textura de pedra 512x512 repetida sem tratamento — linhas de corte (costuras) visíveis em grade. À direita, a MESMA parede com a textura tornada seamless — a repetição não é perceptível.
-Como produzir: no Blender, aplicar uma textura de pedra 512x512 num plano grande com escala de repetição alta (nó Mapping com Scale elevado) e renderizar — as costuras aparecem. Tornar a mesma textura seamless no Krita (offset+patch), reaplicar e renderizar de novo. Compor as duas capturas lado a lado no Krita com rótulos "sem tratamento / seamless".</a:t>
+Objetivo didático — Evidenciar visualmente o problema da costura antes de nomear o conceito de textura seamless.
+Arquivo sugerido — assets/parede_costura_comparacao.webp
+Descrição — Duas renderizações lado a lado de uma mesma parede de pedra: à esquerda, textura de 512×512 repetida sem tratamento (linhas de corte visíveis em grade); à direita, a mesma textura tornada seamless (repetição imperceptível).
+Como produzir — Renderizar no Blender um plano com a textura de demonstração aplicada via nó Image Texture com Mapping repetido, uma vez antes e uma vez depois do tratamento seamless no Krita.</a:t>
             </a:r>
             <a:endParaRPr lang="en-US" dirty="0"/>
           </a:p>
@@ -1944,7 +1939,7 @@
           <a:p>
             <a:r>
               <a:rPr lang="en-US" dirty="0"/>
-              <a:t>Notas: Fixar o conceito central. Superfícies grandes de jogo são maiores que uma única tile. Usar textura pequena repetida é a opção mais eficiente em memória — mas exige seamless. A alternativa (textura única cobrindo tudo) existe, mas não escala para um kit modular. O requisito técnico de continuidade de borda é o mesmo independentemente da trilha visual (fotorrealista ou estilizada). Amarrar ao Projeto Integrador: o kit precisa de superfícies amplas coerentes.</a:t>
+              <a:t>Notas: O problema da costura não é estético, é funcional: quebra a ilusão de realidade independentemente da qualidade artística do resto do material.</a:t>
             </a:r>
             <a:endParaRPr lang="en-US" dirty="0"/>
           </a:p>
@@ -2032,7 +2027,7 @@
           <a:p>
             <a:r>
               <a:rPr lang="en-US" dirty="0"/>
-              <a:t>Notas: O ponto-chave que motiva o método, agora válido para as duas trilhas. A costura não é falha de conteúdo — é diferença entre as bordas. Por isso capturar em iluminação difusa (dia nublado) é tão importante na trilha fotorrealista: sombras duras criam costuras que "giram" com o tile e não se corrigem por offset simples. Na trilha estilizada, o equivalente é uma pincelada que não foi pensada para repetir. Preparar o terreno para a solução: offset.</a:t>
+              <a:t>Notas: Reforçar que o problema é o mesmo nas duas trilhas — muda a fonte da imagem, não o requisito técnico.</a:t>
             </a:r>
             <a:endParaRPr lang="en-US" dirty="0"/>
           </a:p>
@@ -2120,12 +2115,7 @@
           <a:p>
             <a:r>
               <a:rPr lang="en-US" dirty="0"/>
-              <a:t>Notas: Explicar o coração do processo. O offset não conserta nada sozinho — ele TRAZ o problema para onde conseguimos vê-lo e pintar. As bordas passam a ser contínuas; o trabalho de patch acontece no centro. No Krita: Filter &gt; Transform &gt; Offset, 50% em cada eixo. O método é idêntico nas duas trilhas visuais — só muda o que se pinta por cima (clone de pixels reais vs. continuação de pinceladas).
-[!FIGURA]
-Objetivo didático: tornar visível a lógica do offset — o problema não some, ele muda de lugar para poder ser corrigido.
-Arquivo sugerido: assets/offset_traz_costura_ao_centro.webp
-Descrição: textura de pedra em duas etapas. À esquerda, a imagem original com a costura implícita nas bordas (invisível). À direita, a mesma imagem após offset de 50% — as antigas bordas agora formam uma cruz de costuras no centro da imagem, prontas para o patch.
-Como produzir: no Krita, abrir uma foto de pedra, aplicar Filter &gt; Transform &gt; Offset a 50% em X e Y. Capturar antes e depois. Compor lado a lado com uma seta indicando "bordas -&gt; centro".</a:t>
+              <a:t>Notas: Esse é o método clássico e vale para as duas trilhas — a única diferença é se o artista clona pixels de uma foto ou continua pinceladas de uma pintura.</a:t>
             </a:r>
             <a:endParaRPr lang="en-US" dirty="0"/>
           </a:p>
@@ -2213,7 +2203,7 @@
           <a:p>
             <a:r>
               <a:rPr lang="en-US" dirty="0"/>
-              <a:t>Notas: O erro nº 1 do estúdio. Clonar em linha reta cria um novo padrão repetitivo. Orientar pinceladas diagonais e irregulares, seguindo a textura do material. O Smudge suaviza os limites do patch. Mostrar isso ao vivo na demonstração com o Wrap Around ativo. Para quem estiver criando uma textura estilizada do zero (sem foto de origem), os pincéis padrão do Krita com textura de papel/canvas ajudam a manter o resultado coerente com um universo pintado.</a:t>
+              <a:t>Notas: Wrap Around elimina a necessidade de exportar e testar a cada ajuste — é o único feedback confiável em tempo real. Insistir nisso: quem só olha o PNG isolado não vê a costura.</a:t>
             </a:r>
             <a:endParaRPr lang="en-US" dirty="0"/>
           </a:p>

--- a/Slides/Semana 6/semana_6_slides.pptx
+++ b/Slides/Semana 6/semana_6_slides.pptx
@@ -1582,7 +1582,7 @@
           <a:p>
             <a:r>
               <a:rPr lang="en-US" dirty="0"/>
-              <a:t>Notas: Fechamento (10 min): "O Albedo do Hero Asset não é mais uma cor — é uma superfície com história." Ponte: na Semana 7 a ferramenta muda para o 3D Coat, com bake de AO/Curvature/Normal direto da malha — quem está na trilha fotorrealista reforça o desgaste sobre a textura de hoje; quem está na estilizada usa os mesmos mapas como máscara para Smart Materials.</a:t>
+              <a:t>Notas: Fechamento (10 min): "O Albedo do Hero Asset não é mais uma cor — é uma superfície com história." Ponte: na Semana 7 a ferramenta muda para o 3DCoatTextura, com bake de AO/Curvature/Normal direto da malha — quem está na trilha fotorrealista reforça o desgaste sobre a textura de hoje; quem está na estilizada usa os mesmos mapas como máscara para Smart Materials.</a:t>
             </a:r>
             <a:endParaRPr lang="en-US" dirty="0"/>
           </a:p>
